--- a/lectures/week-03/lecture-en.pptx
+++ b/lectures/week-03/lecture-en.pptx
@@ -27091,7 +27091,7 @@
                 </a:solidFill>
                 <a:latin typeface="Source Han Sans SC"/>
               </a:rPr>
-              <a:t>• Push before the lab ends: python src/train.py must run on a teammate's machine unedited</a:t>
+              <a:t>• Push before the lab ends: python src/train.py must run on a fresh clone unedited</a:t>
             </a:r>
           </a:p>
           <a:p>
@@ -27129,7 +27129,7 @@
                 </a:solidFill>
                 <a:latin typeface="Source Han Sans SC"/>
               </a:rPr>
-              <a:t>• Late: −2 team points each time, up to −20</a:t>
+              <a:t>• Late: −2 project points each time, up to −20</a:t>
             </a:r>
           </a:p>
           <a:p>
